--- a/Actividad 5.1 Proyecto integrador_RobertoCahuare_SIM_5ISCM.pptx
+++ b/Actividad 5.1 Proyecto integrador_RobertoCahuare_SIM_5ISCM.pptx
@@ -12316,7 +12316,7 @@
         </p:nvSpPr>
         <p:spPr>
           <a:xfrm>
-            <a:off x="940777" y="325316"/>
+            <a:off x="940777" y="307731"/>
             <a:ext cx="10700238" cy="523220"/>
           </a:xfrm>
           <a:prstGeom prst="rect">
@@ -12336,7 +12336,14 @@
                 <a:latin typeface="Arial" panose="020B0604020202020204" pitchFamily="34" charset="0"/>
                 <a:cs typeface="Arial" panose="020B0604020202020204" pitchFamily="34" charset="0"/>
               </a:rPr>
-              <a:t>FUENTES DE CONSULTA</a:t>
+              <a:t>FUENTES DE </a:t>
+            </a:r>
+            <a:r>
+              <a:rPr lang="es-MX" sz="2800" b="1" dirty="0" smtClean="0">
+                <a:latin typeface="Arial" panose="020B0604020202020204" pitchFamily="34" charset="0"/>
+                <a:cs typeface="Arial" panose="020B0604020202020204" pitchFamily="34" charset="0"/>
+              </a:rPr>
+              <a:t>INFORMACIÓN</a:t>
             </a:r>
             <a:endParaRPr lang="es-MX" sz="2800" b="1" dirty="0">
               <a:latin typeface="Arial" panose="020B0604020202020204" pitchFamily="34" charset="0"/>
@@ -12754,11 +12761,7 @@
             </a:r>
             <a:r>
               <a:rPr lang="es-MX" dirty="0" smtClean="0"/>
-              <a:t> se subieron al repositorio los documentos generados por el proyecto, se encuentra organizado de la siguiente manera: carpeta principal </a:t>
-            </a:r>
-            <a:r>
-              <a:rPr lang="es-MX" dirty="0" smtClean="0"/>
-              <a:t>llamada Tema – 5 dentro de esta carpeta se encuentra </a:t>
+              <a:t> se subieron al repositorio los documentos generados por el proyecto, se encuentra organizado de la siguiente manera: carpeta principal llamada Tema – 5 dentro de esta carpeta se encuentra </a:t>
             </a:r>
             <a:r>
               <a:rPr lang="es-MX" dirty="0"/>
@@ -12774,19 +12777,7 @@
             </a:r>
             <a:r>
               <a:rPr lang="es-MX" dirty="0" smtClean="0"/>
-              <a:t>integrador_RobertoCahuare_SIM_5ISCM y la carpeta </a:t>
-            </a:r>
-            <a:r>
-              <a:rPr lang="es-MX" dirty="0" smtClean="0"/>
-              <a:t>Proyecto </a:t>
-            </a:r>
-            <a:r>
-              <a:rPr lang="es-MX" dirty="0" smtClean="0"/>
-              <a:t>integrador, </a:t>
-            </a:r>
-            <a:r>
-              <a:rPr lang="es-MX" dirty="0" smtClean="0"/>
-              <a:t>dentro de esa carpeta se encuentra otras carpetas con diagramas de flujo,  manual de usuario, manual técnico,  simulaciones, programa final, explicación de los métodos principales en r, Python y </a:t>
+              <a:t>integrador_RobertoCahuare_SIM_5ISCM y la carpeta Proyecto integrador, dentro de esa carpeta se encuentra otras carpetas con diagramas de flujo,  manual de usuario, manual técnico,  simulaciones, programa final, explicación de los métodos principales en r, Python y </a:t>
             </a:r>
             <a:r>
               <a:rPr lang="es-MX" dirty="0" err="1" smtClean="0"/>
@@ -12824,7 +12815,7 @@
           <a:p>
             <a:r>
               <a:rPr lang="es-MX" sz="2400" dirty="0"/>
-              <a:t>https://github.com/morenorobertoc41-bit/Proyecto-integrador.git</a:t>
+              <a:t>https://github.com/morenorobertoc41-bit/Tema-5-simulacion.git</a:t>
             </a:r>
           </a:p>
         </p:txBody>
